--- a/ai-beginner-bootcamp-outline/day_5/Day_5_Slides.pptx
+++ b/ai-beginner-bootcamp-outline/day_5/Day_5_Slides.pptx
@@ -510,7 +510,7 @@
           <a:lstStyle/>
           <a:p>
             <a:r>
-              <a:t>Open with energy and a moment of recognition. Say: 'Take a breath and look at how far you've come. On Monday, many of you had never written a structured prompt. Today you're going to build a team of AI agents that work together while you sleep.' Remind them that the skill they've been building all week is not technical — it's the skill of thinking clearly about work. Today we simply apply that skill to more than one worker at a time. Set the tone: this is the fun day, and it ends with a launch.</a:t>
+              <a:t>Welcome back, and congratulations — you made it to Day 5. Take a second to appreciate how far you've come. On Monday, many of you had never written a prompt with intention. Today you have a Second Brain that captures your notes, organises your knowledge, and answers questions in your own voice. Today we do the fun part: we stop treating AI as one assistant you chat with, and we start treating it as a team you delegate to. Don't worry — nothing today requires you to become a programmer. If you can describe a job to a new intern, you can build a multi-agent team.</a:t>
             </a:r>
           </a:p>
         </p:txBody>
@@ -580,7 +580,7 @@
           <a:lstStyle/>
           <a:p>
             <a:r>
-              <a:t>Use a relatable analogy: 'Imagine hiring one person to be your researcher, your copywriter, your editor AND your fact-checker — all at the same time, in the same five minutes. You'd get something okay but not great.' Explain that this is exactly what happens when we cram everything into one giant prompt. Show a quick before/after if you have it: one bloated prompt versus three focused ones. Emphasise that splitting work into stages is not more complicated — it is actually simpler, because each instruction gets shorter and clearer.</a:t>
+              <a:t>Let's start with a problem many of you already felt this week. You wrote one big prompt: 'Read my notes, summarise them, write a LinkedIn post, check the facts, and schedule it.' And the output was... okay. Mediocre. Here's why. When you stuff one agent with six jobs, it splits its attention and quality drops on every single task. Think about a small business. You wouldn't hire one person to be your accountant, your designer, your salesperson, and your lawyer. You'd hire specialists. AI works the same way. A focused agent with one clear job consistently beats a confused agent with ten. So the skill we're learning today isn't harder prompting — it's better delegation.</a:t>
             </a:r>
           </a:p>
         </p:txBody>
@@ -650,7 +650,7 @@
           <a:lstStyle/>
           <a:p>
             <a:r>
-              <a:t>Walk through each role slowly, using an office metaphor the room will recognise. The Manager is the team lead who says 'you do this, then you do that'. Specialists are your researcher, your writer, your designer. The Reviewer is the quality control person who saves you from embarrassment. Stress the Handoff — this is the concept that makes multi-agent work click. Tell them: 'A team is just specialists plus handoffs. That's the entire idea. Everything else is detail.' Ask the room to name a task in their own job that naturally has three stages.</a:t>
+              <a:t>Here is the simplest team structure that works for almost any knowledge task. Four roles. The Researcher gathers — it searches your notes, your documents, the web, and brings back raw material without trying to be clever. The Analyst makes sense of it — what's the pattern, what matters, what's the angle. The Creator writes the actual thing your audience sees. And the Critic — this is the role everyone skips and everyone regrets skipping — reviews the work against a standard before it goes out. Notice that the Manager is you, at least at first. You set the goal, you kick off the chain. Later you can automate that too, but start manual so you can see what's happening.</a:t>
             </a:r>
           </a:p>
         </p:txBody>
@@ -720,7 +720,7 @@
           <a:lstStyle/>
           <a:p>
             <a:r>
-              <a:t>These are the templates participants will actually reuse, so spend time here. For the Assembly Line, give a concrete example: a market update newsletter where one agent gathers the week's news, one writes it in your voice, one cuts it to 300 words. For the Panel, use a decision example: should we take this client? Get an optimist agent, a risk agent, and a finance agent, then compare. For Inbox Triage, use customer support or recruitment CVs. Tell them to choose ONE shape now — they will build it in the next 40 minutes, so decisiveness matters more than perfection.</a:t>
+              <a:t>So how do they communicate? It's simpler than it sounds. The output of Agent 1 is literally pasted in as the input of Agent 2. That's it. That's the whole magic. We call it a handoff. There are two shapes you'll use most. Sequential is an assembly line — research, then analyse, then write, then review — and this is where I want every one of you to start today, because you can see exactly where things break. Parallel is when three agents work at the same time on different angles and a fourth merges them; it's faster but harder to debug. The golden rule for all of it: each agent must know exactly what job it has, exactly what it's receiving, and exactly what format to hand off. Vague handoffs are where multi-agent systems fall apart.</a:t>
             </a:r>
           </a:p>
         </p:txBody>
@@ -790,7 +790,7 @@
           <a:lstStyle/>
           <a:p>
             <a:r>
-              <a:t>Be honest here; credibility comes from naming the failure modes. Tell a short story of a workflow that looped forever because two agents kept 'improving' each other's work. The fix is boring and effective: tell each agent exactly what it must produce — 'return a bulleted list of 5 items, nothing else' — and cap the revisions. Emphasise the human checkpoint heavily: 'Your name is on the output. Automate the work, never the accountability.' End the slide by giving permission to keep things small: a two-agent team that runs reliably beats a six-agent team that breaks.</a:t>
+              <a:t>Let's build this together right now — open your workspace. We're creating a Content Engine, because almost everyone in this room needs to show up online consistently and almost nobody has the time. Watch what happens. The Researcher agent goes into the Second Brain you built on Day 3 and pulls everything you captured this week. The Analyst reads it and says, 'These three ideas are worth publishing, here's why.' The Creator drafts them in your voice — the voice profile we built yesterday. Then the Critic grades the drafts honestly and fixes the weak ones. Your only job is approval. Follow along with me, then swap the topic to your own industry — real estate, fashion, consulting, whatever you do. Same skeleton, different flesh.</a:t>
             </a:r>
           </a:p>
         </p:txBody>
@@ -860,7 +860,7 @@
           <a:lstStyle/>
           <a:p>
             <a:r>
-              <a:t>Transition into hands-on mode. Put a 40-minute timer on the screen. Repeat the instruction to use a REAL task — the learning only sticks when the output matters. Circulate and ask two diagnostic questions at each table: 'What is each agent's single job?' and 'What exactly does agent one hand to agent two?' If someone is stuck, tell them to cut a stage rather than add one. Warn them at the 10-minute mark and again at the 5-minute mark, because they will want more time. Collect two or three examples to demo in front of the room.</a:t>
+              <a:t>Now the responsible part, and please don't skim this. Multi-agent systems fail in quiet, expensive ways. Agents can invent statistics and pass them confidently down the chain, where the next agent treats them as fact. So: keep a human in the loop at the final gate — always. Give your Critic an actual written checklist, not a vibe; 'reject anything with a statistic that isn't sourced' is a real instruction. Cap your revision loops at two rounds, otherwise agents will politely argue with each other forever and burn your credits. And never, ever let an unsupervised agent send money, sign anything, or handle sensitive client data. Automation with guardrails is leverage. Automation without guardrails is a liability with your name on it.</a:t>
             </a:r>
           </a:p>
         </p:txBody>
@@ -930,7 +930,7 @@
           <a:lstStyle/>
           <a:p>
             <a:r>
-              <a:t>Shift from building to sustaining. Explain that most people leave a bootcamp inspired and change nothing, and the difference between them and the people whose careers shift is a four-week commitment to one workflow. Ask each participant to say out loud, to the person next to them, the exact workflow they will run and the day of the week they will run it. Encourage tracking hours saved — this is the evidence they will use when asking for budget, a raise, or a new role. Remind them that showing a colleague multiplies their reputation inside the organisation.</a:t>
+              <a:t>Knowledge without a deadline becomes a nice memory, so here's your 30-day plan. Week one, run your team by hand daily. Yes, manually. You're not being slow, you're learning where your prompts are weak. Week two, put a trigger on it so it starts itself — a schedule, a form submission, a new note. Week three, build a second team for another bottleneck in your work. Week four, go public with what you built, because this skill is genuinely sellable right now in Nigeria and most people quoting for it have less training than you now have. Track one number all month: hours saved per week. That number is your portfolio, your pricing justification, and your motivation. And please — ship at seventy percent. The people who win with AI are not the smartest ones, they're the ones who put it into the world while everyone else is still polishing.</a:t>
             </a:r>
           </a:p>
         </p:txBody>
@@ -1000,7 +1000,7 @@
           <a:lstStyle/>
           <a:p>
             <a:r>
-              <a:t>Close warmly and with conviction. Recap the arc of the week out loud so they feel the distance travelled — prompting, then structuring, then automating, then delegating, then orchestrating. Name the real insight: the scarce skill is no longer doing the task, it is knowing what excellent output looks like and designing systems to produce it. Invite them into the AgenticLabs community, mention any alumni channel, office hours or next cohort, and ask them to post their first working build this week. Finish with applause for the room and a clear call to action: 'Run your workflow on Monday. Not someday — Monday.'</a:t>
+              <a:t>Let's close. Five days ago most of you came in thinking this bootcamp was about learning to use ChatGPT better. It wasn't. You built infrastructure. There's a difference between someone who uses AI and someone who owns a system that uses AI on their behalf — and you crossed that line this week. Here's the beautiful part: your Second Brain compounds. Every note you capture from today onward makes tomorrow's output sharper. You didn't build a tool, you planted something. Three things before you go. One: post what you built today, tag AgenticLabs, let people see it. Two: stay active in the community — the builders who keep talking to other builders are the ones still building in six months. Three: when the next cohort comes through, come back and teach a session. Teaching is how you'll find out how much you actually know. Thank you for five brilliant days. Now go and ship.</a:t>
             </a:r>
           </a:p>
         </p:txBody>
@@ -4121,7 +4121,7 @@
               </a:defRPr>
             </a:pPr>
             <a:r>
-              <a:t>Day 5: From Solo Assistant to Your Own AI Team</a:t>
+              <a:t>Day 5: From Solo Assistant to a Full Team</a:t>
             </a:r>
           </a:p>
         </p:txBody>
@@ -4151,7 +4151,7 @@
               </a:defRPr>
             </a:pPr>
             <a:r>
-              <a:t>You started this week writing prompts — today you'll direct a team</a:t>
+              <a:t>Days 1-4: You built a Second Brain that captures, organises, and answers</a:t>
             </a:r>
           </a:p>
           <a:p>
@@ -4164,7 +4164,7 @@
               </a:defRPr>
             </a:pPr>
             <a:r>
-              <a:t>Yesterday: one agent doing one job well. Today: several agents working together</a:t>
+              <a:t>Today: You give that brain a team of hands</a:t>
             </a:r>
           </a:p>
           <a:p>
@@ -4177,7 +4177,7 @@
               </a:defRPr>
             </a:pPr>
             <a:r>
-              <a:t>By the end of today, you launch something real that you can use on Monday</a:t>
+              <a:t>One agent is helpful. A team of agents is a business</a:t>
             </a:r>
           </a:p>
           <a:p>
@@ -4190,7 +4190,7 @@
               </a:defRPr>
             </a:pPr>
             <a:r>
-              <a:t>No code required — just clear thinking about who does what</a:t>
+              <a:t>By the end of today, your Second Brain works while you sleep</a:t>
             </a:r>
           </a:p>
         </p:txBody>
@@ -4245,7 +4245,7 @@
               </a:defRPr>
             </a:pPr>
             <a:r>
-              <a:t>Why One Agent Is Not Enough</a:t>
+              <a:t>Why One Agent Is Never Enough</a:t>
             </a:r>
           </a:p>
         </p:txBody>
@@ -4275,7 +4275,7 @@
               </a:defRPr>
             </a:pPr>
             <a:r>
-              <a:t>A single agent asked to do everything becomes vague and mediocre</a:t>
+              <a:t>A single agent doing 6 jobs does all 6 badly — it loses focus</a:t>
             </a:r>
           </a:p>
           <a:p>
@@ -4288,7 +4288,7 @@
               </a:defRPr>
             </a:pPr>
             <a:r>
-              <a:t>Real work has stages: research, then draft, then review, then format</a:t>
+              <a:t>Long, crowded instructions confuse the model (context overload)</a:t>
             </a:r>
           </a:p>
           <a:p>
@@ -4301,7 +4301,7 @@
               </a:defRPr>
             </a:pPr>
             <a:r>
-              <a:t>Mixing stages in one prompt makes the AI average at all of them</a:t>
+              <a:t>Real work has stages: research, then draft, then review, then publish</a:t>
             </a:r>
           </a:p>
           <a:p>
@@ -4314,7 +4314,7 @@
               </a:defRPr>
             </a:pPr>
             <a:r>
-              <a:t>Specialists beat generalists — for humans and for agents</a:t>
+              <a:t>Specialists outperform generalists — for humans AND for AI</a:t>
             </a:r>
           </a:p>
         </p:txBody>
@@ -4369,7 +4369,7 @@
               </a:defRPr>
             </a:pPr>
             <a:r>
-              <a:t>The Anatomy of an AI Team</a:t>
+              <a:t>Meet Your Team: The 4 Core Roles</a:t>
             </a:r>
           </a:p>
         </p:txBody>
@@ -4399,7 +4399,7 @@
               </a:defRPr>
             </a:pPr>
             <a:r>
-              <a:t>The Manager: breaks the goal into tasks and decides the order</a:t>
+              <a:t>The Researcher — digs through your Second Brain and the web for raw material</a:t>
             </a:r>
           </a:p>
           <a:p>
@@ -4412,7 +4412,7 @@
               </a:defRPr>
             </a:pPr>
             <a:r>
-              <a:t>The Specialists: each has one job, one set of instructions, one output</a:t>
+              <a:t>The Analyst — finds patterns, compares options, and makes sense of the mess</a:t>
             </a:r>
           </a:p>
           <a:p>
@@ -4425,7 +4425,7 @@
               </a:defRPr>
             </a:pPr>
             <a:r>
-              <a:t>The Reviewer: checks the work against your standards before it reaches you</a:t>
+              <a:t>The Creator — turns insight into a post, email, proposal, or report</a:t>
             </a:r>
           </a:p>
           <a:p>
@@ -4438,7 +4438,20 @@
               </a:defRPr>
             </a:pPr>
             <a:r>
-              <a:t>The Handoff: the output of one agent becomes the input of the next</a:t>
+              <a:t>The Critic — reviews for accuracy, tone, and quality before anything ships</a:t>
+            </a:r>
+          </a:p>
+          <a:p>
+            <a:pPr>
+              <a:defRPr sz="2400">
+                <a:solidFill>
+                  <a:srgbClr val="FFFFFF"/>
+                </a:solidFill>
+                <a:latin typeface="Arial"/>
+              </a:defRPr>
+            </a:pPr>
+            <a:r>
+              <a:t>The Manager (you, for now) — sets the goal and passes work down the line</a:t>
             </a:r>
           </a:p>
         </p:txBody>
@@ -4493,7 +4506,7 @@
               </a:defRPr>
             </a:pPr>
             <a:r>
-              <a:t>Three Team Shapes You Can Steal Today</a:t>
+              <a:t>How Agents Actually Talk to Each Other</a:t>
             </a:r>
           </a:p>
         </p:txBody>
@@ -4523,7 +4536,7 @@
               </a:defRPr>
             </a:pPr>
             <a:r>
-              <a:t>The Assembly Line: Research → Draft → Edit → Publish (best for content)</a:t>
+              <a:t>The handoff: one agent's output becomes the next agent's input</a:t>
             </a:r>
           </a:p>
           <a:p>
@@ -4536,7 +4549,7 @@
               </a:defRPr>
             </a:pPr>
             <a:r>
-              <a:t>The Panel: three agents give independent opinions, you or a judge agent decides</a:t>
+              <a:t>Sequential chains — Research ➜ Analyse ➜ Write ➜ Review (best for beginners)</a:t>
             </a:r>
           </a:p>
           <a:p>
@@ -4549,7 +4562,7 @@
               </a:defRPr>
             </a:pPr>
             <a:r>
-              <a:t>The Inbox Triage: one agent sorts, then routes each item to the right specialist</a:t>
+              <a:t>Parallel teams — three agents work at once, one merges the results</a:t>
             </a:r>
           </a:p>
           <a:p>
@@ -4562,7 +4575,7 @@
               </a:defRPr>
             </a:pPr>
             <a:r>
-              <a:t>Pick the shape that matches how the work already flows in your role</a:t>
+              <a:t>The golden rule: every agent needs a clear job, clear inputs, clear output format</a:t>
             </a:r>
           </a:p>
         </p:txBody>
@@ -4617,7 +4630,7 @@
               </a:defRPr>
             </a:pPr>
             <a:r>
-              <a:t>Where Teams Go Wrong (And How to Fix It)</a:t>
+              <a:t>Live Build: Your Content Engine</a:t>
             </a:r>
           </a:p>
         </p:txBody>
@@ -4647,7 +4660,7 @@
               </a:defRPr>
             </a:pPr>
             <a:r>
-              <a:t>Vague handoffs — fix by defining the exact output format of each agent</a:t>
+              <a:t>Step 1: Researcher pulls the last 7 days of notes from your Second Brain</a:t>
             </a:r>
           </a:p>
           <a:p>
@@ -4660,7 +4673,7 @@
               </a:defRPr>
             </a:pPr>
             <a:r>
-              <a:t>Runaway loops — fix by setting a limit: 'revise at most twice, then deliver'</a:t>
+              <a:t>Step 2: Analyst picks the 3 strongest ideas and explains why they matter</a:t>
             </a:r>
           </a:p>
           <a:p>
@@ -4673,7 +4686,7 @@
               </a:defRPr>
             </a:pPr>
             <a:r>
-              <a:t>Silent errors — fix by keeping a human checkpoint before anything goes public</a:t>
+              <a:t>Step 3: Creator drafts one LinkedIn post and one newsletter section per idea</a:t>
             </a:r>
           </a:p>
           <a:p>
@@ -4686,7 +4699,20 @@
               </a:defRPr>
             </a:pPr>
             <a:r>
-              <a:t>Over-engineering — if two agents do the job, do not build five</a:t>
+              <a:t>Step 4: Critic scores each draft 1-10 and rewrites anything below 8</a:t>
+            </a:r>
+          </a:p>
+          <a:p>
+            <a:pPr>
+              <a:defRPr sz="2400">
+                <a:solidFill>
+                  <a:srgbClr val="FFFFFF"/>
+                </a:solidFill>
+                <a:latin typeface="Arial"/>
+              </a:defRPr>
+            </a:pPr>
+            <a:r>
+              <a:t>Step 5: You approve and publish — 15 minutes, not 3 hours</a:t>
             </a:r>
           </a:p>
         </p:txBody>
@@ -4741,7 +4767,7 @@
               </a:defRPr>
             </a:pPr>
             <a:r>
-              <a:t>Build Sprint: Your First Agent Team</a:t>
+              <a:t>Guardrails: Keeping Your Team Honest</a:t>
             </a:r>
           </a:p>
         </p:txBody>
@@ -4771,7 +4797,7 @@
               </a:defRPr>
             </a:pPr>
             <a:r>
-              <a:t>Step 1: Write the goal in one sentence — what lands on your desk at the end?</a:t>
+              <a:t>Always keep a human in the loop before anything is published or sent</a:t>
             </a:r>
           </a:p>
           <a:p>
@@ -4784,7 +4810,7 @@
               </a:defRPr>
             </a:pPr>
             <a:r>
-              <a:t>Step 2: List the stages, then give each stage one agent and one instruction</a:t>
+              <a:t>Give the Critic a written standard — 'reject anything with unverified stats'</a:t>
             </a:r>
           </a:p>
           <a:p>
@@ -4797,7 +4823,7 @@
               </a:defRPr>
             </a:pPr>
             <a:r>
-              <a:t>Step 3: Define each handoff — what exactly gets passed forward?</a:t>
+              <a:t>Cap the loops: two revision rounds maximum, then escalate to you</a:t>
             </a:r>
           </a:p>
           <a:p>
@@ -4810,7 +4836,20 @@
               </a:defRPr>
             </a:pPr>
             <a:r>
-              <a:t>Step 4: Run it on a real task from your actual job, not a made-up one</a:t>
+              <a:t>Never let an agent touch money, contracts, or client data unsupervised</a:t>
+            </a:r>
+          </a:p>
+          <a:p>
+            <a:pPr>
+              <a:defRPr sz="2400">
+                <a:solidFill>
+                  <a:srgbClr val="FFFFFF"/>
+                </a:solidFill>
+                <a:latin typeface="Arial"/>
+              </a:defRPr>
+            </a:pPr>
+            <a:r>
+              <a:t>Log the outputs — if quality drops, you need to know which agent slipped</a:t>
             </a:r>
           </a:p>
         </p:txBody>
@@ -4865,7 +4904,7 @@
               </a:defRPr>
             </a:pPr>
             <a:r>
-              <a:t>Launch: Putting It to Work on Monday</a:t>
+              <a:t>Your 30-Day Launch Plan</a:t>
             </a:r>
           </a:p>
         </p:txBody>
@@ -4895,7 +4934,7 @@
               </a:defRPr>
             </a:pPr>
             <a:r>
-              <a:t>Pick your one workflow and commit to running it every week for four weeks</a:t>
+              <a:t>Week 1: Run your team manually every day — watch where it breaks and fix it</a:t>
             </a:r>
           </a:p>
           <a:p>
@@ -4908,7 +4947,7 @@
               </a:defRPr>
             </a:pPr>
             <a:r>
-              <a:t>Track two numbers: hours saved and quality of output (be honest)</a:t>
+              <a:t>Week 2: Automate the trigger (a schedule, a form, or a new note)</a:t>
             </a:r>
           </a:p>
           <a:p>
@@ -4921,7 +4960,7 @@
               </a:defRPr>
             </a:pPr>
             <a:r>
-              <a:t>Show one colleague what you built — teaching is how you keep the skill</a:t>
+              <a:t>Week 3: Add one more team — Inbox Triage, Client Research, or Proposal Writer</a:t>
             </a:r>
           </a:p>
           <a:p>
@@ -4934,7 +4973,33 @@
               </a:defRPr>
             </a:pPr>
             <a:r>
-              <a:t>Improve it once a week; do not rebuild it from scratch</a:t>
+              <a:t>Week 4: Show your work publicly and price it as a service</a:t>
+            </a:r>
+          </a:p>
+          <a:p>
+            <a:pPr>
+              <a:defRPr sz="2400">
+                <a:solidFill>
+                  <a:srgbClr val="FFFFFF"/>
+                </a:solidFill>
+                <a:latin typeface="Arial"/>
+              </a:defRPr>
+            </a:pPr>
+            <a:r>
+              <a:t>Track one number: hours saved per week. That's your proof</a:t>
+            </a:r>
+          </a:p>
+          <a:p>
+            <a:pPr>
+              <a:defRPr sz="2400">
+                <a:solidFill>
+                  <a:srgbClr val="FFFFFF"/>
+                </a:solidFill>
+                <a:latin typeface="Arial"/>
+              </a:defRPr>
+            </a:pPr>
+            <a:r>
+              <a:t>Ship at 70% ready — a live imperfect system beats a perfect plan</a:t>
             </a:r>
           </a:p>
         </p:txBody>
@@ -4989,7 +5054,7 @@
               </a:defRPr>
             </a:pPr>
             <a:r>
-              <a:t>You Are Now the Person Who Builds the Systems</a:t>
+              <a:t>You Didn't Just Learn AI. You Built Infrastructure.</a:t>
             </a:r>
           </a:p>
         </p:txBody>
@@ -5019,7 +5084,7 @@
               </a:defRPr>
             </a:pPr>
             <a:r>
-              <a:t>Day 1 you wrote prompts. Day 5 you designed a working AI team</a:t>
+              <a:t>Day 1: You learned to think in prompts. Day 2: You captured everything</a:t>
             </a:r>
           </a:p>
           <a:p>
@@ -5032,7 +5097,7 @@
               </a:defRPr>
             </a:pPr>
             <a:r>
-              <a:t>You are not competing with AI — you are the one who directs it</a:t>
+              <a:t>Day 3: You built a brain that remembers. Day 4: You gave it your voice</a:t>
             </a:r>
           </a:p>
           <a:p>
@@ -5045,7 +5110,7 @@
               </a:defRPr>
             </a:pPr>
             <a:r>
-              <a:t>Your advantage is judgement: knowing what good looks like</a:t>
+              <a:t>Day 5: You gave it a team that works without you</a:t>
             </a:r>
           </a:p>
           <a:p>
@@ -5058,7 +5123,20 @@
               </a:defRPr>
             </a:pPr>
             <a:r>
-              <a:t>Stay in the community, share your builds, and come back to teach</a:t>
+              <a:t>You now have a system that compounds — every note makes it smarter</a:t>
+            </a:r>
+          </a:p>
+          <a:p>
+            <a:pPr>
+              <a:defRPr sz="2400">
+                <a:solidFill>
+                  <a:srgbClr val="FFFFFF"/>
+                </a:solidFill>
+                <a:latin typeface="Arial"/>
+              </a:defRPr>
+            </a:pPr>
+            <a:r>
+              <a:t>Stay in the community, share your builds, and come back to teach the next cohort</a:t>
             </a:r>
           </a:p>
         </p:txBody>
